--- a/Caffeine Intake Analysis.pptx
+++ b/Caffeine Intake Analysis.pptx
@@ -2,44 +2,47 @@
 <file path=ppt/presentation.xml><?xml version="1.0" encoding="utf-8"?>
 <p:presentation xmlns:a="http://schemas.openxmlformats.org/drawingml/2006/main" xmlns:r="http://schemas.openxmlformats.org/officeDocument/2006/relationships" xmlns:mc="http://schemas.openxmlformats.org/markup-compatibility/2006" xmlns:mv="urn:schemas-microsoft-com:mac:vml" xmlns:p="http://schemas.openxmlformats.org/presentationml/2006/main" xmlns:c="http://schemas.openxmlformats.org/drawingml/2006/chart" xmlns:dgm="http://schemas.openxmlformats.org/drawingml/2006/diagram" xmlns:o="urn:schemas-microsoft-com:office:office" xmlns:v="urn:schemas-microsoft-com:vml" xmlns:pvml="urn:schemas-microsoft-com:office:powerpoint" xmlns:com="http://schemas.openxmlformats.org/drawingml/2006/compatibility" xmlns:p14="http://schemas.microsoft.com/office/powerpoint/2010/main" xmlns:p15="http://schemas.microsoft.com/office/powerpoint/2012/main" xmlns:ahyp="http://schemas.microsoft.com/office/drawing/2018/hyperlinkcolor" autoCompressPictures="0" embedTrueTypeFonts="1" strictFirstAndLastChars="0" saveSubsetFonts="1">
   <p:sldMasterIdLst>
-    <p:sldMasterId id="2147483689" r:id="rId4"/>
-    <p:sldMasterId id="2147483690" r:id="rId5"/>
+    <p:sldMasterId id="2147483689" r:id="rId5"/>
+    <p:sldMasterId id="2147483690" r:id="rId6"/>
   </p:sldMasterIdLst>
   <p:notesMasterIdLst>
-    <p:notesMasterId r:id="rId6"/>
+    <p:notesMasterId r:id="rId7"/>
   </p:notesMasterIdLst>
   <p:sldIdLst>
-    <p:sldId id="256" r:id="rId7"/>
-    <p:sldId id="257" r:id="rId8"/>
-    <p:sldId id="258" r:id="rId9"/>
-    <p:sldId id="259" r:id="rId10"/>
-    <p:sldId id="260" r:id="rId11"/>
-    <p:sldId id="261" r:id="rId12"/>
-    <p:sldId id="262" r:id="rId13"/>
+    <p:sldId id="256" r:id="rId8"/>
+    <p:sldId id="257" r:id="rId9"/>
+    <p:sldId id="258" r:id="rId10"/>
+    <p:sldId id="259" r:id="rId11"/>
+    <p:sldId id="260" r:id="rId12"/>
+    <p:sldId id="261" r:id="rId13"/>
+    <p:sldId id="262" r:id="rId14"/>
+    <p:sldId id="263" r:id="rId15"/>
+    <p:sldId id="264" r:id="rId16"/>
+    <p:sldId id="265" r:id="rId17"/>
   </p:sldIdLst>
   <p:sldSz cy="5143500" cx="9144000"/>
   <p:notesSz cx="6858000" cy="9144000"/>
   <p:embeddedFontLst>
     <p:embeddedFont>
       <p:font typeface="DM Sans Medium"/>
-      <p:regular r:id="rId14"/>
-      <p:bold r:id="rId15"/>
-      <p:italic r:id="rId16"/>
-      <p:boldItalic r:id="rId17"/>
-    </p:embeddedFont>
-    <p:embeddedFont>
-      <p:font typeface="Merriweather"/>
       <p:regular r:id="rId18"/>
       <p:bold r:id="rId19"/>
       <p:italic r:id="rId20"/>
       <p:boldItalic r:id="rId21"/>
     </p:embeddedFont>
     <p:embeddedFont>
-      <p:font typeface="DM Sans"/>
+      <p:font typeface="Merriweather"/>
       <p:regular r:id="rId22"/>
       <p:bold r:id="rId23"/>
       <p:italic r:id="rId24"/>
       <p:boldItalic r:id="rId25"/>
+    </p:embeddedFont>
+    <p:embeddedFont>
+      <p:font typeface="DM Sans"/>
+      <p:regular r:id="rId26"/>
+      <p:bold r:id="rId27"/>
+      <p:italic r:id="rId28"/>
+      <p:boldItalic r:id="rId29"/>
     </p:embeddedFont>
   </p:embeddedFontLst>
   <p:defaultTextStyle>
@@ -815,6 +818,105 @@
 </p:notes>
 </file>
 
+<file path=ppt/notesSlides/notesSlide10.xml><?xml version="1.0" encoding="utf-8"?>
+<p:notes xmlns:a="http://schemas.openxmlformats.org/drawingml/2006/main" xmlns:r="http://schemas.openxmlformats.org/officeDocument/2006/relationships" xmlns:mc="http://schemas.openxmlformats.org/markup-compatibility/2006" xmlns:mv="urn:schemas-microsoft-com:mac:vml" xmlns:p="http://schemas.openxmlformats.org/presentationml/2006/main" xmlns:c="http://schemas.openxmlformats.org/drawingml/2006/chart" xmlns:dgm="http://schemas.openxmlformats.org/drawingml/2006/diagram" xmlns:o="urn:schemas-microsoft-com:office:office" xmlns:v="urn:schemas-microsoft-com:vml" xmlns:pvml="urn:schemas-microsoft-com:office:powerpoint" xmlns:com="http://schemas.openxmlformats.org/drawingml/2006/compatibility" xmlns:p14="http://schemas.microsoft.com/office/powerpoint/2010/main" xmlns:p15="http://schemas.microsoft.com/office/powerpoint/2012/main" xmlns:ahyp="http://schemas.microsoft.com/office/drawing/2018/hyperlinkcolor" showMasterPhAnim="0" showMasterSp="0">
+  <p:cSld>
+    <p:spTree>
+      <p:nvGrpSpPr>
+        <p:cNvPr id="338" name="Shape 338"/>
+        <p:cNvGrpSpPr/>
+        <p:nvPr/>
+      </p:nvGrpSpPr>
+      <p:grpSpPr>
+        <a:xfrm>
+          <a:off x="0" y="0"/>
+          <a:ext cx="0" cy="0"/>
+          <a:chOff x="0" y="0"/>
+          <a:chExt cx="0" cy="0"/>
+        </a:xfrm>
+      </p:grpSpPr>
+      <p:sp>
+        <p:nvSpPr>
+          <p:cNvPr id="339" name="Google Shape;339;g3dae037791d_0_23:notes"/>
+          <p:cNvSpPr/>
+          <p:nvPr>
+            <p:ph idx="2" type="sldImg"/>
+          </p:nvPr>
+        </p:nvSpPr>
+        <p:spPr>
+          <a:xfrm>
+            <a:off x="381300" y="685800"/>
+            <a:ext cx="6096000" cy="3429000"/>
+          </a:xfrm>
+          <a:custGeom>
+            <a:rect b="b" l="l" r="r" t="t"/>
+            <a:pathLst>
+              <a:path extrusionOk="0" h="120000" w="120000">
+                <a:moveTo>
+                  <a:pt x="0" y="0"/>
+                </a:moveTo>
+                <a:lnTo>
+                  <a:pt x="120000" y="0"/>
+                </a:lnTo>
+                <a:lnTo>
+                  <a:pt x="120000" y="120000"/>
+                </a:lnTo>
+                <a:lnTo>
+                  <a:pt x="0" y="120000"/>
+                </a:lnTo>
+                <a:close/>
+              </a:path>
+            </a:pathLst>
+          </a:custGeom>
+        </p:spPr>
+      </p:sp>
+      <p:sp>
+        <p:nvSpPr>
+          <p:cNvPr id="340" name="Google Shape;340;g3dae037791d_0_23:notes"/>
+          <p:cNvSpPr txBox="1"/>
+          <p:nvPr>
+            <p:ph idx="1" type="body"/>
+          </p:nvPr>
+        </p:nvSpPr>
+        <p:spPr>
+          <a:xfrm>
+            <a:off x="685800" y="4343400"/>
+            <a:ext cx="5486400" cy="4114800"/>
+          </a:xfrm>
+          <a:prstGeom prst="rect">
+            <a:avLst/>
+          </a:prstGeom>
+        </p:spPr>
+        <p:txBody>
+          <a:bodyPr anchorCtr="0" anchor="t" bIns="91425" lIns="91425" spcFirstLastPara="1" rIns="91425" wrap="square" tIns="91425">
+            <a:noAutofit/>
+          </a:bodyPr>
+          <a:lstStyle/>
+          <a:p>
+            <a:pPr indent="0" lvl="0" marL="0" rtl="0" algn="l">
+              <a:spcBef>
+                <a:spcPts val="0"/>
+              </a:spcBef>
+              <a:spcAft>
+                <a:spcPts val="0"/>
+              </a:spcAft>
+              <a:buNone/>
+            </a:pPr>
+            <a:r>
+              <a:t/>
+            </a:r>
+            <a:endParaRPr/>
+          </a:p>
+        </p:txBody>
+      </p:sp>
+    </p:spTree>
+  </p:cSld>
+  <p:clrMapOvr>
+    <a:masterClrMapping/>
+  </p:clrMapOvr>
+</p:notes>
+</file>
+
 <file path=ppt/notesSlides/notesSlide2.xml><?xml version="1.0" encoding="utf-8"?>
 <p:notes xmlns:a="http://schemas.openxmlformats.org/drawingml/2006/main" xmlns:r="http://schemas.openxmlformats.org/officeDocument/2006/relationships" xmlns:mc="http://schemas.openxmlformats.org/markup-compatibility/2006" xmlns:mv="urn:schemas-microsoft-com:mac:vml" xmlns:p="http://schemas.openxmlformats.org/presentationml/2006/main" xmlns:c="http://schemas.openxmlformats.org/drawingml/2006/chart" xmlns:dgm="http://schemas.openxmlformats.org/drawingml/2006/diagram" xmlns:o="urn:schemas-microsoft-com:office:office" xmlns:v="urn:schemas-microsoft-com:vml" xmlns:pvml="urn:schemas-microsoft-com:office:powerpoint" xmlns:com="http://schemas.openxmlformats.org/drawingml/2006/compatibility" xmlns:p14="http://schemas.microsoft.com/office/powerpoint/2010/main" xmlns:p15="http://schemas.microsoft.com/office/powerpoint/2012/main" xmlns:ahyp="http://schemas.microsoft.com/office/drawing/2018/hyperlinkcolor" showMasterPhAnim="0" showMasterSp="0">
   <p:cSld>
@@ -1032,7 +1134,7 @@
       </p:grpSpPr>
       <p:sp>
         <p:nvSpPr>
-          <p:cNvPr id="285" name="Google Shape;285;g3da9a153cc4_0_88:notes"/>
+          <p:cNvPr id="285" name="Google Shape;285;g3dae037791d_0_0:notes"/>
           <p:cNvSpPr/>
           <p:nvPr>
             <p:ph idx="2" type="sldImg"/>
@@ -1067,7 +1169,7 @@
       </p:sp>
       <p:sp>
         <p:nvSpPr>
-          <p:cNvPr id="286" name="Google Shape;286;g3da9a153cc4_0_88:notes"/>
+          <p:cNvPr id="286" name="Google Shape;286;g3dae037791d_0_0:notes"/>
           <p:cNvSpPr txBox="1"/>
           <p:nvPr>
             <p:ph idx="1" type="body"/>
@@ -1131,7 +1233,7 @@
       </p:grpSpPr>
       <p:sp>
         <p:nvSpPr>
-          <p:cNvPr id="293" name="Google Shape;293;g3da9a153cc4_0_95:notes"/>
+          <p:cNvPr id="293" name="Google Shape;293;g3da9a153cc4_0_88:notes"/>
           <p:cNvSpPr/>
           <p:nvPr>
             <p:ph idx="2" type="sldImg"/>
@@ -1166,7 +1268,7 @@
       </p:sp>
       <p:sp>
         <p:nvSpPr>
-          <p:cNvPr id="294" name="Google Shape;294;g3da9a153cc4_0_95:notes"/>
+          <p:cNvPr id="294" name="Google Shape;294;g3da9a153cc4_0_88:notes"/>
           <p:cNvSpPr txBox="1"/>
           <p:nvPr>
             <p:ph idx="1" type="body"/>
@@ -1216,7 +1318,7 @@
   <p:cSld>
     <p:spTree>
       <p:nvGrpSpPr>
-        <p:cNvPr id="303" name="Shape 303"/>
+        <p:cNvPr id="300" name="Shape 300"/>
         <p:cNvGrpSpPr/>
         <p:nvPr/>
       </p:nvGrpSpPr>
@@ -1230,7 +1332,7 @@
       </p:grpSpPr>
       <p:sp>
         <p:nvSpPr>
-          <p:cNvPr id="304" name="Google Shape;304;g3da9a153cc4_0_476:notes"/>
+          <p:cNvPr id="301" name="Google Shape;301;g3da9a153cc4_0_95:notes"/>
           <p:cNvSpPr/>
           <p:nvPr>
             <p:ph idx="2" type="sldImg"/>
@@ -1265,7 +1367,7 @@
       </p:sp>
       <p:sp>
         <p:nvSpPr>
-          <p:cNvPr id="305" name="Google Shape;305;g3da9a153cc4_0_476:notes"/>
+          <p:cNvPr id="302" name="Google Shape;302;g3da9a153cc4_0_95:notes"/>
           <p:cNvSpPr txBox="1"/>
           <p:nvPr>
             <p:ph idx="1" type="body"/>
@@ -1315,7 +1417,7 @@
   <p:cSld>
     <p:spTree>
       <p:nvGrpSpPr>
-        <p:cNvPr id="312" name="Shape 312"/>
+        <p:cNvPr id="311" name="Shape 311"/>
         <p:cNvGrpSpPr/>
         <p:nvPr/>
       </p:nvGrpSpPr>
@@ -1329,7 +1431,7 @@
       </p:grpSpPr>
       <p:sp>
         <p:nvSpPr>
-          <p:cNvPr id="313" name="Google Shape;313;g3da9a153cc4_0_221:notes"/>
+          <p:cNvPr id="312" name="Google Shape;312;g3da9a153cc4_0_476:notes"/>
           <p:cNvSpPr/>
           <p:nvPr>
             <p:ph idx="2" type="sldImg"/>
@@ -1364,7 +1466,205 @@
       </p:sp>
       <p:sp>
         <p:nvSpPr>
-          <p:cNvPr id="314" name="Google Shape;314;g3da9a153cc4_0_221:notes"/>
+          <p:cNvPr id="313" name="Google Shape;313;g3da9a153cc4_0_476:notes"/>
+          <p:cNvSpPr txBox="1"/>
+          <p:nvPr>
+            <p:ph idx="1" type="body"/>
+          </p:nvPr>
+        </p:nvSpPr>
+        <p:spPr>
+          <a:xfrm>
+            <a:off x="685800" y="4343400"/>
+            <a:ext cx="5486400" cy="4114800"/>
+          </a:xfrm>
+          <a:prstGeom prst="rect">
+            <a:avLst/>
+          </a:prstGeom>
+        </p:spPr>
+        <p:txBody>
+          <a:bodyPr anchorCtr="0" anchor="t" bIns="91425" lIns="91425" spcFirstLastPara="1" rIns="91425" wrap="square" tIns="91425">
+            <a:noAutofit/>
+          </a:bodyPr>
+          <a:lstStyle/>
+          <a:p>
+            <a:pPr indent="0" lvl="0" marL="0" rtl="0" algn="l">
+              <a:spcBef>
+                <a:spcPts val="0"/>
+              </a:spcBef>
+              <a:spcAft>
+                <a:spcPts val="0"/>
+              </a:spcAft>
+              <a:buNone/>
+            </a:pPr>
+            <a:r>
+              <a:t/>
+            </a:r>
+            <a:endParaRPr/>
+          </a:p>
+        </p:txBody>
+      </p:sp>
+    </p:spTree>
+  </p:cSld>
+  <p:clrMapOvr>
+    <a:masterClrMapping/>
+  </p:clrMapOvr>
+</p:notes>
+</file>
+
+<file path=ppt/notesSlides/notesSlide8.xml><?xml version="1.0" encoding="utf-8"?>
+<p:notes xmlns:a="http://schemas.openxmlformats.org/drawingml/2006/main" xmlns:r="http://schemas.openxmlformats.org/officeDocument/2006/relationships" xmlns:mc="http://schemas.openxmlformats.org/markup-compatibility/2006" xmlns:mv="urn:schemas-microsoft-com:mac:vml" xmlns:p="http://schemas.openxmlformats.org/presentationml/2006/main" xmlns:c="http://schemas.openxmlformats.org/drawingml/2006/chart" xmlns:dgm="http://schemas.openxmlformats.org/drawingml/2006/diagram" xmlns:o="urn:schemas-microsoft-com:office:office" xmlns:v="urn:schemas-microsoft-com:vml" xmlns:pvml="urn:schemas-microsoft-com:office:powerpoint" xmlns:com="http://schemas.openxmlformats.org/drawingml/2006/compatibility" xmlns:p14="http://schemas.microsoft.com/office/powerpoint/2010/main" xmlns:p15="http://schemas.microsoft.com/office/powerpoint/2012/main" xmlns:ahyp="http://schemas.microsoft.com/office/drawing/2018/hyperlinkcolor" showMasterPhAnim="0" showMasterSp="0">
+  <p:cSld>
+    <p:spTree>
+      <p:nvGrpSpPr>
+        <p:cNvPr id="320" name="Shape 320"/>
+        <p:cNvGrpSpPr/>
+        <p:nvPr/>
+      </p:nvGrpSpPr>
+      <p:grpSpPr>
+        <a:xfrm>
+          <a:off x="0" y="0"/>
+          <a:ext cx="0" cy="0"/>
+          <a:chOff x="0" y="0"/>
+          <a:chExt cx="0" cy="0"/>
+        </a:xfrm>
+      </p:grpSpPr>
+      <p:sp>
+        <p:nvSpPr>
+          <p:cNvPr id="321" name="Google Shape;321;g3da9a153cc4_0_221:notes"/>
+          <p:cNvSpPr/>
+          <p:nvPr>
+            <p:ph idx="2" type="sldImg"/>
+          </p:nvPr>
+        </p:nvSpPr>
+        <p:spPr>
+          <a:xfrm>
+            <a:off x="381300" y="685800"/>
+            <a:ext cx="6096000" cy="3429000"/>
+          </a:xfrm>
+          <a:custGeom>
+            <a:rect b="b" l="l" r="r" t="t"/>
+            <a:pathLst>
+              <a:path extrusionOk="0" h="120000" w="120000">
+                <a:moveTo>
+                  <a:pt x="0" y="0"/>
+                </a:moveTo>
+                <a:lnTo>
+                  <a:pt x="120000" y="0"/>
+                </a:lnTo>
+                <a:lnTo>
+                  <a:pt x="120000" y="120000"/>
+                </a:lnTo>
+                <a:lnTo>
+                  <a:pt x="0" y="120000"/>
+                </a:lnTo>
+                <a:close/>
+              </a:path>
+            </a:pathLst>
+          </a:custGeom>
+        </p:spPr>
+      </p:sp>
+      <p:sp>
+        <p:nvSpPr>
+          <p:cNvPr id="322" name="Google Shape;322;g3da9a153cc4_0_221:notes"/>
+          <p:cNvSpPr txBox="1"/>
+          <p:nvPr>
+            <p:ph idx="1" type="body"/>
+          </p:nvPr>
+        </p:nvSpPr>
+        <p:spPr>
+          <a:xfrm>
+            <a:off x="685800" y="4343400"/>
+            <a:ext cx="5486400" cy="4114800"/>
+          </a:xfrm>
+          <a:prstGeom prst="rect">
+            <a:avLst/>
+          </a:prstGeom>
+        </p:spPr>
+        <p:txBody>
+          <a:bodyPr anchorCtr="0" anchor="t" bIns="91425" lIns="91425" spcFirstLastPara="1" rIns="91425" wrap="square" tIns="91425">
+            <a:noAutofit/>
+          </a:bodyPr>
+          <a:lstStyle/>
+          <a:p>
+            <a:pPr indent="0" lvl="0" marL="0" rtl="0" algn="l">
+              <a:spcBef>
+                <a:spcPts val="0"/>
+              </a:spcBef>
+              <a:spcAft>
+                <a:spcPts val="0"/>
+              </a:spcAft>
+              <a:buNone/>
+            </a:pPr>
+            <a:r>
+              <a:t/>
+            </a:r>
+            <a:endParaRPr/>
+          </a:p>
+        </p:txBody>
+      </p:sp>
+    </p:spTree>
+  </p:cSld>
+  <p:clrMapOvr>
+    <a:masterClrMapping/>
+  </p:clrMapOvr>
+</p:notes>
+</file>
+
+<file path=ppt/notesSlides/notesSlide9.xml><?xml version="1.0" encoding="utf-8"?>
+<p:notes xmlns:a="http://schemas.openxmlformats.org/drawingml/2006/main" xmlns:r="http://schemas.openxmlformats.org/officeDocument/2006/relationships" xmlns:mc="http://schemas.openxmlformats.org/markup-compatibility/2006" xmlns:mv="urn:schemas-microsoft-com:mac:vml" xmlns:p="http://schemas.openxmlformats.org/presentationml/2006/main" xmlns:c="http://schemas.openxmlformats.org/drawingml/2006/chart" xmlns:dgm="http://schemas.openxmlformats.org/drawingml/2006/diagram" xmlns:o="urn:schemas-microsoft-com:office:office" xmlns:v="urn:schemas-microsoft-com:vml" xmlns:pvml="urn:schemas-microsoft-com:office:powerpoint" xmlns:com="http://schemas.openxmlformats.org/drawingml/2006/compatibility" xmlns:p14="http://schemas.microsoft.com/office/powerpoint/2010/main" xmlns:p15="http://schemas.microsoft.com/office/powerpoint/2012/main" xmlns:ahyp="http://schemas.microsoft.com/office/drawing/2018/hyperlinkcolor" showMasterPhAnim="0" showMasterSp="0">
+  <p:cSld>
+    <p:spTree>
+      <p:nvGrpSpPr>
+        <p:cNvPr id="330" name="Shape 330"/>
+        <p:cNvGrpSpPr/>
+        <p:nvPr/>
+      </p:nvGrpSpPr>
+      <p:grpSpPr>
+        <a:xfrm>
+          <a:off x="0" y="0"/>
+          <a:ext cx="0" cy="0"/>
+          <a:chOff x="0" y="0"/>
+          <a:chExt cx="0" cy="0"/>
+        </a:xfrm>
+      </p:grpSpPr>
+      <p:sp>
+        <p:nvSpPr>
+          <p:cNvPr id="331" name="Google Shape;331;g3dae037791d_0_15:notes"/>
+          <p:cNvSpPr/>
+          <p:nvPr>
+            <p:ph idx="2" type="sldImg"/>
+          </p:nvPr>
+        </p:nvSpPr>
+        <p:spPr>
+          <a:xfrm>
+            <a:off x="381300" y="685800"/>
+            <a:ext cx="6096000" cy="3429000"/>
+          </a:xfrm>
+          <a:custGeom>
+            <a:rect b="b" l="l" r="r" t="t"/>
+            <a:pathLst>
+              <a:path extrusionOk="0" h="120000" w="120000">
+                <a:moveTo>
+                  <a:pt x="0" y="0"/>
+                </a:moveTo>
+                <a:lnTo>
+                  <a:pt x="120000" y="0"/>
+                </a:lnTo>
+                <a:lnTo>
+                  <a:pt x="120000" y="120000"/>
+                </a:lnTo>
+                <a:lnTo>
+                  <a:pt x="0" y="120000"/>
+                </a:lnTo>
+                <a:close/>
+              </a:path>
+            </a:pathLst>
+          </a:custGeom>
+        </p:spPr>
+      </p:sp>
+      <p:sp>
+        <p:nvSpPr>
+          <p:cNvPr id="332" name="Google Shape;332;g3dae037791d_0_15:notes"/>
           <p:cNvSpPr txBox="1"/>
           <p:nvPr>
             <p:ph idx="1" type="body"/>
@@ -31057,6 +31357,196 @@
 </p:sld>
 </file>
 
+<file path=ppt/slides/slide10.xml><?xml version="1.0" encoding="utf-8"?>
+<p:sld xmlns:a="http://schemas.openxmlformats.org/drawingml/2006/main" xmlns:r="http://schemas.openxmlformats.org/officeDocument/2006/relationships" xmlns:mc="http://schemas.openxmlformats.org/markup-compatibility/2006" xmlns:mv="urn:schemas-microsoft-com:mac:vml" xmlns:p="http://schemas.openxmlformats.org/presentationml/2006/main" xmlns:c="http://schemas.openxmlformats.org/drawingml/2006/chart" xmlns:dgm="http://schemas.openxmlformats.org/drawingml/2006/diagram" xmlns:o="urn:schemas-microsoft-com:office:office" xmlns:v="urn:schemas-microsoft-com:vml" xmlns:pvml="urn:schemas-microsoft-com:office:powerpoint" xmlns:com="http://schemas.openxmlformats.org/drawingml/2006/compatibility" xmlns:p14="http://schemas.microsoft.com/office/powerpoint/2010/main" xmlns:p15="http://schemas.microsoft.com/office/powerpoint/2012/main" xmlns:ahyp="http://schemas.microsoft.com/office/drawing/2018/hyperlinkcolor">
+  <p:cSld>
+    <p:spTree>
+      <p:nvGrpSpPr>
+        <p:cNvPr id="341" name="Shape 341"/>
+        <p:cNvGrpSpPr/>
+        <p:nvPr/>
+      </p:nvGrpSpPr>
+      <p:grpSpPr>
+        <a:xfrm>
+          <a:off x="0" y="0"/>
+          <a:ext cx="0" cy="0"/>
+          <a:chOff x="0" y="0"/>
+          <a:chExt cx="0" cy="0"/>
+        </a:xfrm>
+      </p:grpSpPr>
+      <p:sp>
+        <p:nvSpPr>
+          <p:cNvPr id="342" name="Google Shape;342;p53"/>
+          <p:cNvSpPr txBox="1"/>
+          <p:nvPr>
+            <p:ph type="title"/>
+          </p:nvPr>
+        </p:nvSpPr>
+        <p:spPr>
+          <a:xfrm>
+            <a:off x="3743700" y="1277400"/>
+            <a:ext cx="1656600" cy="588600"/>
+          </a:xfrm>
+          <a:prstGeom prst="rect">
+            <a:avLst/>
+          </a:prstGeom>
+        </p:spPr>
+        <p:txBody>
+          <a:bodyPr anchorCtr="0" anchor="b" bIns="91425" lIns="91425" spcFirstLastPara="1" rIns="91425" wrap="square" tIns="91425">
+            <a:noAutofit/>
+          </a:bodyPr>
+          <a:lstStyle/>
+          <a:p>
+            <a:pPr indent="0" lvl="0" marL="0" rtl="0" algn="l">
+              <a:spcBef>
+                <a:spcPts val="0"/>
+              </a:spcBef>
+              <a:spcAft>
+                <a:spcPts val="0"/>
+              </a:spcAft>
+              <a:buNone/>
+            </a:pPr>
+            <a:r>
+              <a:rPr lang="en"/>
+              <a:t>Github</a:t>
+            </a:r>
+            <a:endParaRPr/>
+          </a:p>
+        </p:txBody>
+      </p:sp>
+      <p:sp>
+        <p:nvSpPr>
+          <p:cNvPr id="343" name="Google Shape;343;p53"/>
+          <p:cNvSpPr txBox="1"/>
+          <p:nvPr>
+            <p:ph idx="1" type="body"/>
+          </p:nvPr>
+        </p:nvSpPr>
+        <p:spPr>
+          <a:xfrm>
+            <a:off x="2362625" y="2386100"/>
+            <a:ext cx="4951500" cy="1822500"/>
+          </a:xfrm>
+          <a:prstGeom prst="rect">
+            <a:avLst/>
+          </a:prstGeom>
+        </p:spPr>
+        <p:txBody>
+          <a:bodyPr anchorCtr="0" anchor="t" bIns="91425" lIns="91425" spcFirstLastPara="1" rIns="91425" wrap="square" tIns="91425">
+            <a:noAutofit/>
+          </a:bodyPr>
+          <a:lstStyle/>
+          <a:p>
+            <a:pPr indent="0" lvl="0" marL="0" rtl="0" algn="l">
+              <a:spcBef>
+                <a:spcPts val="0"/>
+              </a:spcBef>
+              <a:spcAft>
+                <a:spcPts val="1200"/>
+              </a:spcAft>
+              <a:buNone/>
+            </a:pPr>
+            <a:r>
+              <a:rPr lang="en" sz="2200" u="sng">
+                <a:solidFill>
+                  <a:schemeClr val="hlink"/>
+                </a:solidFill>
+                <a:hlinkClick r:id="rId3"/>
+              </a:rPr>
+              <a:t>https://github.com/Blake-Dee/DATA</a:t>
+            </a:r>
+            <a:endParaRPr sz="2200"/>
+          </a:p>
+        </p:txBody>
+      </p:sp>
+      <p:sp>
+        <p:nvSpPr>
+          <p:cNvPr id="344" name="Google Shape;344;p53"/>
+          <p:cNvSpPr txBox="1"/>
+          <p:nvPr>
+            <p:ph idx="3" type="body"/>
+          </p:nvPr>
+        </p:nvSpPr>
+        <p:spPr>
+          <a:xfrm>
+            <a:off x="196951" y="196725"/>
+            <a:ext cx="1860300" cy="209100"/>
+          </a:xfrm>
+          <a:prstGeom prst="rect">
+            <a:avLst/>
+          </a:prstGeom>
+        </p:spPr>
+        <p:txBody>
+          <a:bodyPr anchorCtr="0" anchor="ctr" bIns="91425" lIns="91425" spcFirstLastPara="1" rIns="91425" wrap="square" tIns="91425">
+            <a:noAutofit/>
+          </a:bodyPr>
+          <a:lstStyle/>
+          <a:p>
+            <a:pPr indent="0" lvl="0" marL="0" rtl="0" algn="l">
+              <a:spcBef>
+                <a:spcPts val="0"/>
+              </a:spcBef>
+              <a:spcAft>
+                <a:spcPts val="1200"/>
+              </a:spcAft>
+              <a:buNone/>
+            </a:pPr>
+            <a:r>
+              <a:rPr lang="en"/>
+              <a:t>Github Link</a:t>
+            </a:r>
+            <a:endParaRPr/>
+          </a:p>
+        </p:txBody>
+      </p:sp>
+      <p:sp>
+        <p:nvSpPr>
+          <p:cNvPr id="345" name="Google Shape;345;p53"/>
+          <p:cNvSpPr txBox="1"/>
+          <p:nvPr>
+            <p:ph idx="4" type="body"/>
+          </p:nvPr>
+        </p:nvSpPr>
+        <p:spPr>
+          <a:xfrm>
+            <a:off x="7087526" y="196725"/>
+            <a:ext cx="1933500" cy="209100"/>
+          </a:xfrm>
+          <a:prstGeom prst="rect">
+            <a:avLst/>
+          </a:prstGeom>
+        </p:spPr>
+        <p:txBody>
+          <a:bodyPr anchorCtr="0" anchor="ctr" bIns="91425" lIns="91425" spcFirstLastPara="1" rIns="91425" wrap="square" tIns="91425">
+            <a:noAutofit/>
+          </a:bodyPr>
+          <a:lstStyle/>
+          <a:p>
+            <a:pPr indent="0" lvl="0" marL="0" rtl="0" algn="r">
+              <a:spcBef>
+                <a:spcPts val="0"/>
+              </a:spcBef>
+              <a:spcAft>
+                <a:spcPts val="1200"/>
+              </a:spcAft>
+              <a:buNone/>
+            </a:pPr>
+            <a:r>
+              <a:rPr lang="en"/>
+              <a:t>Caffeine Study</a:t>
+            </a:r>
+            <a:endParaRPr/>
+          </a:p>
+        </p:txBody>
+      </p:sp>
+    </p:spTree>
+  </p:cSld>
+  <p:clrMapOvr>
+    <a:masterClrMapping/>
+  </p:clrMapOvr>
+</p:sld>
+</file>
+
 <file path=ppt/slides/slide2.xml><?xml version="1.0" encoding="utf-8"?>
 <p:sld xmlns:a="http://schemas.openxmlformats.org/drawingml/2006/main" xmlns:r="http://schemas.openxmlformats.org/officeDocument/2006/relationships" xmlns:mc="http://schemas.openxmlformats.org/markup-compatibility/2006" xmlns:mv="urn:schemas-microsoft-com:mac:vml" xmlns:p="http://schemas.openxmlformats.org/presentationml/2006/main" xmlns:c="http://schemas.openxmlformats.org/drawingml/2006/chart" xmlns:dgm="http://schemas.openxmlformats.org/drawingml/2006/diagram" xmlns:o="urn:schemas-microsoft-com:office:office" xmlns:v="urn:schemas-microsoft-com:vml" xmlns:pvml="urn:schemas-microsoft-com:office:powerpoint" xmlns:com="http://schemas.openxmlformats.org/drawingml/2006/compatibility" xmlns:p14="http://schemas.microsoft.com/office/powerpoint/2010/main" xmlns:p15="http://schemas.microsoft.com/office/powerpoint/2012/main" xmlns:ahyp="http://schemas.microsoft.com/office/drawing/2018/hyperlinkcolor">
   <p:cSld>
@@ -31310,7 +31800,7 @@
             </a:pPr>
             <a:r>
               <a:rPr lang="en"/>
-              <a:t>Data</a:t>
+              <a:t>Data Set</a:t>
             </a:r>
             <a:endParaRPr/>
           </a:p>
@@ -31762,6 +32252,745 @@
           <p:cNvPr id="288" name="Google Shape;288;p47"/>
           <p:cNvSpPr txBox="1"/>
           <p:nvPr>
+            <p:ph type="title"/>
+          </p:nvPr>
+        </p:nvSpPr>
+        <p:spPr>
+          <a:xfrm>
+            <a:off x="3407850" y="405825"/>
+            <a:ext cx="2328300" cy="1089000"/>
+          </a:xfrm>
+          <a:prstGeom prst="rect">
+            <a:avLst/>
+          </a:prstGeom>
+        </p:spPr>
+        <p:txBody>
+          <a:bodyPr anchorCtr="0" anchor="b" bIns="91425" lIns="91425" spcFirstLastPara="1" rIns="91425" wrap="square" tIns="91425">
+            <a:noAutofit/>
+          </a:bodyPr>
+          <a:lstStyle/>
+          <a:p>
+            <a:pPr indent="0" lvl="0" marL="0" rtl="0" algn="l">
+              <a:spcBef>
+                <a:spcPts val="0"/>
+              </a:spcBef>
+              <a:spcAft>
+                <a:spcPts val="0"/>
+              </a:spcAft>
+              <a:buNone/>
+            </a:pPr>
+            <a:r>
+              <a:rPr lang="en"/>
+              <a:t>Summary Statistics</a:t>
+            </a:r>
+            <a:endParaRPr/>
+          </a:p>
+        </p:txBody>
+      </p:sp>
+      <p:sp>
+        <p:nvSpPr>
+          <p:cNvPr id="289" name="Google Shape;289;p47"/>
+          <p:cNvSpPr txBox="1"/>
+          <p:nvPr>
+            <p:ph idx="3" type="body"/>
+          </p:nvPr>
+        </p:nvSpPr>
+        <p:spPr>
+          <a:xfrm>
+            <a:off x="196951" y="196725"/>
+            <a:ext cx="1860600" cy="209100"/>
+          </a:xfrm>
+          <a:prstGeom prst="rect">
+            <a:avLst/>
+          </a:prstGeom>
+        </p:spPr>
+        <p:txBody>
+          <a:bodyPr anchorCtr="0" anchor="ctr" bIns="91425" lIns="91425" spcFirstLastPara="1" rIns="91425" wrap="square" tIns="91425">
+            <a:noAutofit/>
+          </a:bodyPr>
+          <a:lstStyle/>
+          <a:p>
+            <a:pPr indent="0" lvl="0" marL="0" rtl="0" algn="l">
+              <a:spcBef>
+                <a:spcPts val="0"/>
+              </a:spcBef>
+              <a:spcAft>
+                <a:spcPts val="1200"/>
+              </a:spcAft>
+              <a:buNone/>
+            </a:pPr>
+            <a:r>
+              <a:rPr lang="en"/>
+              <a:t>Summary Statistics</a:t>
+            </a:r>
+            <a:endParaRPr/>
+          </a:p>
+        </p:txBody>
+      </p:sp>
+      <p:sp>
+        <p:nvSpPr>
+          <p:cNvPr id="290" name="Google Shape;290;p47"/>
+          <p:cNvSpPr txBox="1"/>
+          <p:nvPr>
+            <p:ph idx="4" type="body"/>
+          </p:nvPr>
+        </p:nvSpPr>
+        <p:spPr>
+          <a:xfrm>
+            <a:off x="7087526" y="196725"/>
+            <a:ext cx="1933500" cy="209100"/>
+          </a:xfrm>
+          <a:prstGeom prst="rect">
+            <a:avLst/>
+          </a:prstGeom>
+        </p:spPr>
+        <p:txBody>
+          <a:bodyPr anchorCtr="0" anchor="ctr" bIns="91425" lIns="91425" spcFirstLastPara="1" rIns="91425" wrap="square" tIns="91425">
+            <a:noAutofit/>
+          </a:bodyPr>
+          <a:lstStyle/>
+          <a:p>
+            <a:pPr indent="0" lvl="0" marL="0" rtl="0" algn="r">
+              <a:spcBef>
+                <a:spcPts val="0"/>
+              </a:spcBef>
+              <a:spcAft>
+                <a:spcPts val="1200"/>
+              </a:spcAft>
+              <a:buNone/>
+            </a:pPr>
+            <a:r>
+              <a:rPr lang="en"/>
+              <a:t>Caffeine Study</a:t>
+            </a:r>
+            <a:endParaRPr/>
+          </a:p>
+        </p:txBody>
+      </p:sp>
+      <p:graphicFrame>
+        <p:nvGraphicFramePr>
+          <p:cNvPr id="291" name="Google Shape;291;p47"/>
+          <p:cNvGraphicFramePr/>
+          <p:nvPr/>
+        </p:nvGraphicFramePr>
+        <p:xfrm>
+          <a:off x="952500" y="1545125"/>
+          <a:ext cx="3000000" cy="3000000"/>
+        </p:xfrm>
+        <a:graphic>
+          <a:graphicData uri="http://schemas.openxmlformats.org/drawingml/2006/table">
+            <a:tbl>
+              <a:tblPr>
+                <a:noFill/>
+                <a:tableStyleId>{AF84D67F-F2F8-4357-BCB7-50C9C38DCF80}</a:tableStyleId>
+              </a:tblPr>
+              <a:tblGrid>
+                <a:gridCol w="2413000"/>
+                <a:gridCol w="2413000"/>
+                <a:gridCol w="2413000"/>
+              </a:tblGrid>
+              <a:tr h="381000">
+                <a:tc>
+                  <a:txBody>
+                    <a:bodyPr/>
+                    <a:lstStyle/>
+                    <a:p>
+                      <a:pPr indent="0" lvl="0" marL="0" rtl="0" algn="l">
+                        <a:spcBef>
+                          <a:spcPts val="0"/>
+                        </a:spcBef>
+                        <a:spcAft>
+                          <a:spcPts val="0"/>
+                        </a:spcAft>
+                        <a:buNone/>
+                      </a:pPr>
+                      <a:r>
+                        <a:rPr lang="en"/>
+                        <a:t>Summary:</a:t>
+                      </a:r>
+                      <a:endParaRPr/>
+                    </a:p>
+                  </a:txBody>
+                  <a:tcPr marT="91425" marB="91425" marR="91425" marL="91425"/>
+                </a:tc>
+                <a:tc>
+                  <a:txBody>
+                    <a:bodyPr/>
+                    <a:lstStyle/>
+                    <a:p>
+                      <a:pPr indent="0" lvl="0" marL="0" rtl="0" algn="l">
+                        <a:spcBef>
+                          <a:spcPts val="0"/>
+                        </a:spcBef>
+                        <a:spcAft>
+                          <a:spcPts val="0"/>
+                        </a:spcAft>
+                        <a:buNone/>
+                      </a:pPr>
+                      <a:r>
+                        <a:rPr lang="en"/>
+                        <a:t>School Days (mg)</a:t>
+                      </a:r>
+                      <a:endParaRPr/>
+                    </a:p>
+                  </a:txBody>
+                  <a:tcPr marT="91425" marB="91425" marR="91425" marL="91425"/>
+                </a:tc>
+                <a:tc>
+                  <a:txBody>
+                    <a:bodyPr/>
+                    <a:lstStyle/>
+                    <a:p>
+                      <a:pPr indent="0" lvl="0" marL="0" rtl="0" algn="l">
+                        <a:spcBef>
+                          <a:spcPts val="0"/>
+                        </a:spcBef>
+                        <a:spcAft>
+                          <a:spcPts val="0"/>
+                        </a:spcAft>
+                        <a:buNone/>
+                      </a:pPr>
+                      <a:r>
+                        <a:rPr lang="en"/>
+                        <a:t>Work Days (mg)</a:t>
+                      </a:r>
+                      <a:endParaRPr/>
+                    </a:p>
+                  </a:txBody>
+                  <a:tcPr marT="91425" marB="91425" marR="91425" marL="91425"/>
+                </a:tc>
+              </a:tr>
+              <a:tr h="381000">
+                <a:tc>
+                  <a:txBody>
+                    <a:bodyPr/>
+                    <a:lstStyle/>
+                    <a:p>
+                      <a:pPr indent="0" lvl="0" marL="0" rtl="0" algn="l">
+                        <a:spcBef>
+                          <a:spcPts val="0"/>
+                        </a:spcBef>
+                        <a:spcAft>
+                          <a:spcPts val="0"/>
+                        </a:spcAft>
+                        <a:buNone/>
+                      </a:pPr>
+                      <a:r>
+                        <a:rPr lang="en"/>
+                        <a:t>Minimum</a:t>
+                      </a:r>
+                      <a:endParaRPr/>
+                    </a:p>
+                  </a:txBody>
+                  <a:tcPr marT="91425" marB="91425" marR="91425" marL="91425"/>
+                </a:tc>
+                <a:tc>
+                  <a:txBody>
+                    <a:bodyPr/>
+                    <a:lstStyle/>
+                    <a:p>
+                      <a:pPr indent="0" lvl="0" marL="0" rtl="0" algn="l">
+                        <a:spcBef>
+                          <a:spcPts val="0"/>
+                        </a:spcBef>
+                        <a:spcAft>
+                          <a:spcPts val="0"/>
+                        </a:spcAft>
+                        <a:buNone/>
+                      </a:pPr>
+                      <a:r>
+                        <a:rPr lang="en"/>
+                        <a:t>34</a:t>
+                      </a:r>
+                      <a:endParaRPr/>
+                    </a:p>
+                  </a:txBody>
+                  <a:tcPr marT="91425" marB="91425" marR="91425" marL="91425"/>
+                </a:tc>
+                <a:tc>
+                  <a:txBody>
+                    <a:bodyPr/>
+                    <a:lstStyle/>
+                    <a:p>
+                      <a:pPr indent="0" lvl="0" marL="0" rtl="0" algn="l">
+                        <a:spcBef>
+                          <a:spcPts val="0"/>
+                        </a:spcBef>
+                        <a:spcAft>
+                          <a:spcPts val="0"/>
+                        </a:spcAft>
+                        <a:buNone/>
+                      </a:pPr>
+                      <a:r>
+                        <a:rPr lang="en"/>
+                        <a:t>134</a:t>
+                      </a:r>
+                      <a:endParaRPr/>
+                    </a:p>
+                  </a:txBody>
+                  <a:tcPr marT="91425" marB="91425" marR="91425" marL="91425"/>
+                </a:tc>
+              </a:tr>
+              <a:tr h="381000">
+                <a:tc>
+                  <a:txBody>
+                    <a:bodyPr/>
+                    <a:lstStyle/>
+                    <a:p>
+                      <a:pPr indent="0" lvl="0" marL="0" rtl="0" algn="l">
+                        <a:spcBef>
+                          <a:spcPts val="0"/>
+                        </a:spcBef>
+                        <a:spcAft>
+                          <a:spcPts val="0"/>
+                        </a:spcAft>
+                        <a:buNone/>
+                      </a:pPr>
+                      <a:r>
+                        <a:rPr lang="en"/>
+                        <a:t>1st Quartile</a:t>
+                      </a:r>
+                      <a:endParaRPr/>
+                    </a:p>
+                  </a:txBody>
+                  <a:tcPr marT="91425" marB="91425" marR="91425" marL="91425"/>
+                </a:tc>
+                <a:tc>
+                  <a:txBody>
+                    <a:bodyPr/>
+                    <a:lstStyle/>
+                    <a:p>
+                      <a:pPr indent="0" lvl="0" marL="0" rtl="0" algn="l">
+                        <a:spcBef>
+                          <a:spcPts val="0"/>
+                        </a:spcBef>
+                        <a:spcAft>
+                          <a:spcPts val="0"/>
+                        </a:spcAft>
+                        <a:buNone/>
+                      </a:pPr>
+                      <a:r>
+                        <a:rPr lang="en"/>
+                        <a:t>150</a:t>
+                      </a:r>
+                      <a:endParaRPr/>
+                    </a:p>
+                  </a:txBody>
+                  <a:tcPr marT="91425" marB="91425" marR="91425" marL="91425"/>
+                </a:tc>
+                <a:tc>
+                  <a:txBody>
+                    <a:bodyPr/>
+                    <a:lstStyle/>
+                    <a:p>
+                      <a:pPr indent="0" lvl="0" marL="0" rtl="0" algn="l">
+                        <a:spcBef>
+                          <a:spcPts val="0"/>
+                        </a:spcBef>
+                        <a:spcAft>
+                          <a:spcPts val="0"/>
+                        </a:spcAft>
+                        <a:buNone/>
+                      </a:pPr>
+                      <a:r>
+                        <a:rPr lang="en"/>
+                        <a:t>200</a:t>
+                      </a:r>
+                      <a:endParaRPr/>
+                    </a:p>
+                  </a:txBody>
+                  <a:tcPr marT="91425" marB="91425" marR="91425" marL="91425"/>
+                </a:tc>
+              </a:tr>
+              <a:tr h="381000">
+                <a:tc>
+                  <a:txBody>
+                    <a:bodyPr/>
+                    <a:lstStyle/>
+                    <a:p>
+                      <a:pPr indent="0" lvl="0" marL="0" rtl="0" algn="l">
+                        <a:spcBef>
+                          <a:spcPts val="0"/>
+                        </a:spcBef>
+                        <a:spcAft>
+                          <a:spcPts val="0"/>
+                        </a:spcAft>
+                        <a:buNone/>
+                      </a:pPr>
+                      <a:r>
+                        <a:rPr lang="en"/>
+                        <a:t>Mean</a:t>
+                      </a:r>
+                      <a:endParaRPr/>
+                    </a:p>
+                  </a:txBody>
+                  <a:tcPr marT="91425" marB="91425" marR="91425" marL="91425"/>
+                </a:tc>
+                <a:tc>
+                  <a:txBody>
+                    <a:bodyPr/>
+                    <a:lstStyle/>
+                    <a:p>
+                      <a:pPr indent="0" lvl="0" marL="0" rtl="0" algn="l">
+                        <a:spcBef>
+                          <a:spcPts val="0"/>
+                        </a:spcBef>
+                        <a:spcAft>
+                          <a:spcPts val="0"/>
+                        </a:spcAft>
+                        <a:buNone/>
+                      </a:pPr>
+                      <a:r>
+                        <a:rPr lang="en"/>
+                        <a:t>270.62</a:t>
+                      </a:r>
+                      <a:endParaRPr/>
+                    </a:p>
+                  </a:txBody>
+                  <a:tcPr marT="91425" marB="91425" marR="91425" marL="91425"/>
+                </a:tc>
+                <a:tc>
+                  <a:txBody>
+                    <a:bodyPr/>
+                    <a:lstStyle/>
+                    <a:p>
+                      <a:pPr indent="0" lvl="0" marL="0" rtl="0" algn="l">
+                        <a:spcBef>
+                          <a:spcPts val="0"/>
+                        </a:spcBef>
+                        <a:spcAft>
+                          <a:spcPts val="0"/>
+                        </a:spcAft>
+                        <a:buNone/>
+                      </a:pPr>
+                      <a:r>
+                        <a:rPr lang="en"/>
+                        <a:t>284.78</a:t>
+                      </a:r>
+                      <a:endParaRPr/>
+                    </a:p>
+                  </a:txBody>
+                  <a:tcPr marT="91425" marB="91425" marR="91425" marL="91425"/>
+                </a:tc>
+              </a:tr>
+              <a:tr h="381000">
+                <a:tc>
+                  <a:txBody>
+                    <a:bodyPr/>
+                    <a:lstStyle/>
+                    <a:p>
+                      <a:pPr indent="0" lvl="0" marL="0" rtl="0" algn="l">
+                        <a:spcBef>
+                          <a:spcPts val="0"/>
+                        </a:spcBef>
+                        <a:spcAft>
+                          <a:spcPts val="0"/>
+                        </a:spcAft>
+                        <a:buNone/>
+                      </a:pPr>
+                      <a:r>
+                        <a:rPr lang="en"/>
+                        <a:t>Median</a:t>
+                      </a:r>
+                      <a:endParaRPr/>
+                    </a:p>
+                  </a:txBody>
+                  <a:tcPr marT="91425" marB="91425" marR="91425" marL="91425"/>
+                </a:tc>
+                <a:tc>
+                  <a:txBody>
+                    <a:bodyPr/>
+                    <a:lstStyle/>
+                    <a:p>
+                      <a:pPr indent="0" lvl="0" marL="0" rtl="0" algn="l">
+                        <a:spcBef>
+                          <a:spcPts val="0"/>
+                        </a:spcBef>
+                        <a:spcAft>
+                          <a:spcPts val="0"/>
+                        </a:spcAft>
+                        <a:buNone/>
+                      </a:pPr>
+                      <a:r>
+                        <a:rPr lang="en"/>
+                        <a:t>300</a:t>
+                      </a:r>
+                      <a:endParaRPr/>
+                    </a:p>
+                  </a:txBody>
+                  <a:tcPr marT="91425" marB="91425" marR="91425" marL="91425"/>
+                </a:tc>
+                <a:tc>
+                  <a:txBody>
+                    <a:bodyPr/>
+                    <a:lstStyle/>
+                    <a:p>
+                      <a:pPr indent="0" lvl="0" marL="0" rtl="0" algn="l">
+                        <a:spcBef>
+                          <a:spcPts val="0"/>
+                        </a:spcBef>
+                        <a:spcAft>
+                          <a:spcPts val="0"/>
+                        </a:spcAft>
+                        <a:buNone/>
+                      </a:pPr>
+                      <a:r>
+                        <a:rPr lang="en"/>
+                        <a:t>300</a:t>
+                      </a:r>
+                      <a:endParaRPr/>
+                    </a:p>
+                  </a:txBody>
+                  <a:tcPr marT="91425" marB="91425" marR="91425" marL="91425"/>
+                </a:tc>
+              </a:tr>
+              <a:tr h="381000">
+                <a:tc>
+                  <a:txBody>
+                    <a:bodyPr/>
+                    <a:lstStyle/>
+                    <a:p>
+                      <a:pPr indent="0" lvl="0" marL="0" rtl="0" algn="l">
+                        <a:spcBef>
+                          <a:spcPts val="0"/>
+                        </a:spcBef>
+                        <a:spcAft>
+                          <a:spcPts val="0"/>
+                        </a:spcAft>
+                        <a:buNone/>
+                      </a:pPr>
+                      <a:r>
+                        <a:rPr lang="en"/>
+                        <a:t>3rd Quartile</a:t>
+                      </a:r>
+                      <a:endParaRPr/>
+                    </a:p>
+                  </a:txBody>
+                  <a:tcPr marT="91425" marB="91425" marR="91425" marL="91425"/>
+                </a:tc>
+                <a:tc>
+                  <a:txBody>
+                    <a:bodyPr/>
+                    <a:lstStyle/>
+                    <a:p>
+                      <a:pPr indent="0" lvl="0" marL="0" rtl="0" algn="l">
+                        <a:spcBef>
+                          <a:spcPts val="0"/>
+                        </a:spcBef>
+                        <a:spcAft>
+                          <a:spcPts val="0"/>
+                        </a:spcAft>
+                        <a:buNone/>
+                      </a:pPr>
+                      <a:r>
+                        <a:rPr lang="en"/>
+                        <a:t>350</a:t>
+                      </a:r>
+                      <a:endParaRPr/>
+                    </a:p>
+                  </a:txBody>
+                  <a:tcPr marT="91425" marB="91425" marR="91425" marL="91425"/>
+                </a:tc>
+                <a:tc>
+                  <a:txBody>
+                    <a:bodyPr/>
+                    <a:lstStyle/>
+                    <a:p>
+                      <a:pPr indent="0" lvl="0" marL="0" rtl="0" algn="l">
+                        <a:spcBef>
+                          <a:spcPts val="0"/>
+                        </a:spcBef>
+                        <a:spcAft>
+                          <a:spcPts val="0"/>
+                        </a:spcAft>
+                        <a:buNone/>
+                      </a:pPr>
+                      <a:r>
+                        <a:rPr lang="en"/>
+                        <a:t>367</a:t>
+                      </a:r>
+                      <a:endParaRPr/>
+                    </a:p>
+                  </a:txBody>
+                  <a:tcPr marT="91425" marB="91425" marR="91425" marL="91425"/>
+                </a:tc>
+              </a:tr>
+              <a:tr h="381000">
+                <a:tc>
+                  <a:txBody>
+                    <a:bodyPr/>
+                    <a:lstStyle/>
+                    <a:p>
+                      <a:pPr indent="0" lvl="0" marL="0" rtl="0" algn="l">
+                        <a:spcBef>
+                          <a:spcPts val="0"/>
+                        </a:spcBef>
+                        <a:spcAft>
+                          <a:spcPts val="0"/>
+                        </a:spcAft>
+                        <a:buNone/>
+                      </a:pPr>
+                      <a:r>
+                        <a:rPr lang="en"/>
+                        <a:t>Maximum</a:t>
+                      </a:r>
+                      <a:endParaRPr/>
+                    </a:p>
+                  </a:txBody>
+                  <a:tcPr marT="91425" marB="91425" marR="91425" marL="91425"/>
+                </a:tc>
+                <a:tc>
+                  <a:txBody>
+                    <a:bodyPr/>
+                    <a:lstStyle/>
+                    <a:p>
+                      <a:pPr indent="0" lvl="0" marL="0" rtl="0" algn="l">
+                        <a:spcBef>
+                          <a:spcPts val="0"/>
+                        </a:spcBef>
+                        <a:spcAft>
+                          <a:spcPts val="0"/>
+                        </a:spcAft>
+                        <a:buNone/>
+                      </a:pPr>
+                      <a:r>
+                        <a:rPr lang="en"/>
+                        <a:t>454</a:t>
+                      </a:r>
+                      <a:endParaRPr/>
+                    </a:p>
+                  </a:txBody>
+                  <a:tcPr marT="91425" marB="91425" marR="91425" marL="91425"/>
+                </a:tc>
+                <a:tc>
+                  <a:txBody>
+                    <a:bodyPr/>
+                    <a:lstStyle/>
+                    <a:p>
+                      <a:pPr indent="0" lvl="0" marL="0" rtl="0" algn="l">
+                        <a:spcBef>
+                          <a:spcPts val="0"/>
+                        </a:spcBef>
+                        <a:spcAft>
+                          <a:spcPts val="0"/>
+                        </a:spcAft>
+                        <a:buNone/>
+                      </a:pPr>
+                      <a:r>
+                        <a:rPr lang="en"/>
+                        <a:t>425</a:t>
+                      </a:r>
+                      <a:endParaRPr/>
+                    </a:p>
+                  </a:txBody>
+                  <a:tcPr marT="91425" marB="91425" marR="91425" marL="91425"/>
+                </a:tc>
+              </a:tr>
+              <a:tr h="381000">
+                <a:tc>
+                  <a:txBody>
+                    <a:bodyPr/>
+                    <a:lstStyle/>
+                    <a:p>
+                      <a:pPr indent="0" lvl="0" marL="0" rtl="0" algn="l">
+                        <a:spcBef>
+                          <a:spcPts val="0"/>
+                        </a:spcBef>
+                        <a:spcAft>
+                          <a:spcPts val="0"/>
+                        </a:spcAft>
+                        <a:buNone/>
+                      </a:pPr>
+                      <a:r>
+                        <a:rPr lang="en"/>
+                        <a:t>Standard Deviation</a:t>
+                      </a:r>
+                      <a:endParaRPr/>
+                    </a:p>
+                  </a:txBody>
+                  <a:tcPr marT="91425" marB="91425" marR="91425" marL="91425"/>
+                </a:tc>
+                <a:tc>
+                  <a:txBody>
+                    <a:bodyPr/>
+                    <a:lstStyle/>
+                    <a:p>
+                      <a:pPr indent="0" lvl="0" marL="0" rtl="0" algn="l">
+                        <a:spcBef>
+                          <a:spcPts val="0"/>
+                        </a:spcBef>
+                        <a:spcAft>
+                          <a:spcPts val="0"/>
+                        </a:spcAft>
+                        <a:buNone/>
+                      </a:pPr>
+                      <a:r>
+                        <a:rPr lang="en"/>
+                        <a:t>118.04</a:t>
+                      </a:r>
+                      <a:endParaRPr/>
+                    </a:p>
+                  </a:txBody>
+                  <a:tcPr marT="91425" marB="91425" marR="91425" marL="91425"/>
+                </a:tc>
+                <a:tc>
+                  <a:txBody>
+                    <a:bodyPr/>
+                    <a:lstStyle/>
+                    <a:p>
+                      <a:pPr indent="0" lvl="0" marL="0" rtl="0" algn="l">
+                        <a:spcBef>
+                          <a:spcPts val="0"/>
+                        </a:spcBef>
+                        <a:spcAft>
+                          <a:spcPts val="0"/>
+                        </a:spcAft>
+                        <a:buNone/>
+                      </a:pPr>
+                      <a:r>
+                        <a:rPr lang="en"/>
+                        <a:t>93.19</a:t>
+                      </a:r>
+                      <a:endParaRPr/>
+                    </a:p>
+                  </a:txBody>
+                  <a:tcPr marT="91425" marB="91425" marR="91425" marL="91425"/>
+                </a:tc>
+              </a:tr>
+            </a:tbl>
+          </a:graphicData>
+        </a:graphic>
+      </p:graphicFrame>
+    </p:spTree>
+  </p:cSld>
+  <p:clrMapOvr>
+    <a:masterClrMapping/>
+  </p:clrMapOvr>
+</p:sld>
+</file>
+
+<file path=ppt/slides/slide5.xml><?xml version="1.0" encoding="utf-8"?>
+<p:sld xmlns:a="http://schemas.openxmlformats.org/drawingml/2006/main" xmlns:r="http://schemas.openxmlformats.org/officeDocument/2006/relationships" xmlns:mc="http://schemas.openxmlformats.org/markup-compatibility/2006" xmlns:mv="urn:schemas-microsoft-com:mac:vml" xmlns:p="http://schemas.openxmlformats.org/presentationml/2006/main" xmlns:c="http://schemas.openxmlformats.org/drawingml/2006/chart" xmlns:dgm="http://schemas.openxmlformats.org/drawingml/2006/diagram" xmlns:o="urn:schemas-microsoft-com:office:office" xmlns:v="urn:schemas-microsoft-com:vml" xmlns:pvml="urn:schemas-microsoft-com:office:powerpoint" xmlns:com="http://schemas.openxmlformats.org/drawingml/2006/compatibility" xmlns:p14="http://schemas.microsoft.com/office/powerpoint/2010/main" xmlns:p15="http://schemas.microsoft.com/office/powerpoint/2012/main" xmlns:ahyp="http://schemas.microsoft.com/office/drawing/2018/hyperlinkcolor">
+  <p:cSld>
+    <p:spTree>
+      <p:nvGrpSpPr>
+        <p:cNvPr id="295" name="Shape 295"/>
+        <p:cNvGrpSpPr/>
+        <p:nvPr/>
+      </p:nvGrpSpPr>
+      <p:grpSpPr>
+        <a:xfrm>
+          <a:off x="0" y="0"/>
+          <a:ext cx="0" cy="0"/>
+          <a:chOff x="0" y="0"/>
+          <a:chExt cx="0" cy="0"/>
+        </a:xfrm>
+      </p:grpSpPr>
+      <p:sp>
+        <p:nvSpPr>
+          <p:cNvPr id="296" name="Google Shape;296;p48"/>
+          <p:cNvSpPr txBox="1"/>
+          <p:nvPr>
             <p:ph idx="1" type="subTitle"/>
           </p:nvPr>
         </p:nvSpPr>
@@ -31799,7 +33028,7 @@
       </p:sp>
       <p:sp>
         <p:nvSpPr>
-          <p:cNvPr id="289" name="Google Shape;289;p47"/>
+          <p:cNvPr id="297" name="Google Shape;297;p48"/>
           <p:cNvSpPr txBox="1"/>
           <p:nvPr>
             <p:ph idx="2" type="body"/>
@@ -31839,7 +33068,7 @@
       </p:sp>
       <p:sp>
         <p:nvSpPr>
-          <p:cNvPr id="290" name="Google Shape;290;p47"/>
+          <p:cNvPr id="298" name="Google Shape;298;p48"/>
           <p:cNvSpPr txBox="1"/>
           <p:nvPr>
             <p:ph idx="3" type="body"/>
@@ -31887,7 +33116,7 @@
       </p:sp>
       <p:sp>
         <p:nvSpPr>
-          <p:cNvPr id="291" name="Google Shape;291;p47"/>
+          <p:cNvPr id="299" name="Google Shape;299;p48"/>
           <p:cNvSpPr txBox="1"/>
           <p:nvPr/>
         </p:nvSpPr>
@@ -32110,12 +33339,12 @@
 </p:sld>
 </file>
 
-<file path=ppt/slides/slide5.xml><?xml version="1.0" encoding="utf-8"?>
+<file path=ppt/slides/slide6.xml><?xml version="1.0" encoding="utf-8"?>
 <p:sld xmlns:a="http://schemas.openxmlformats.org/drawingml/2006/main" xmlns:r="http://schemas.openxmlformats.org/officeDocument/2006/relationships" xmlns:mc="http://schemas.openxmlformats.org/markup-compatibility/2006" xmlns:mv="urn:schemas-microsoft-com:mac:vml" xmlns:p="http://schemas.openxmlformats.org/presentationml/2006/main" xmlns:c="http://schemas.openxmlformats.org/drawingml/2006/chart" xmlns:dgm="http://schemas.openxmlformats.org/drawingml/2006/diagram" xmlns:o="urn:schemas-microsoft-com:office:office" xmlns:v="urn:schemas-microsoft-com:vml" xmlns:pvml="urn:schemas-microsoft-com:office:powerpoint" xmlns:com="http://schemas.openxmlformats.org/drawingml/2006/compatibility" xmlns:p14="http://schemas.microsoft.com/office/powerpoint/2010/main" xmlns:p15="http://schemas.microsoft.com/office/powerpoint/2012/main" xmlns:ahyp="http://schemas.microsoft.com/office/drawing/2018/hyperlinkcolor">
   <p:cSld>
     <p:spTree>
       <p:nvGrpSpPr>
-        <p:cNvPr id="295" name="Shape 295"/>
+        <p:cNvPr id="303" name="Shape 303"/>
         <p:cNvGrpSpPr/>
         <p:nvPr/>
       </p:nvGrpSpPr>
@@ -32129,7 +33358,7 @@
       </p:grpSpPr>
       <p:sp>
         <p:nvSpPr>
-          <p:cNvPr id="296" name="Google Shape;296;p48"/>
+          <p:cNvPr id="304" name="Google Shape;304;p49"/>
           <p:cNvSpPr txBox="1"/>
           <p:nvPr>
             <p:ph type="title"/>
@@ -32169,7 +33398,7 @@
       </p:sp>
       <p:sp>
         <p:nvSpPr>
-          <p:cNvPr id="297" name="Google Shape;297;p48"/>
+          <p:cNvPr id="305" name="Google Shape;305;p49"/>
           <p:cNvSpPr txBox="1"/>
           <p:nvPr>
             <p:ph idx="1" type="body"/>
@@ -32357,7 +33586,7 @@
       </p:sp>
       <p:sp>
         <p:nvSpPr>
-          <p:cNvPr id="298" name="Google Shape;298;p48"/>
+          <p:cNvPr id="306" name="Google Shape;306;p49"/>
           <p:cNvSpPr txBox="1"/>
           <p:nvPr>
             <p:ph idx="2" type="body"/>
@@ -32397,7 +33626,7 @@
       </p:sp>
       <p:sp>
         <p:nvSpPr>
-          <p:cNvPr id="299" name="Google Shape;299;p48"/>
+          <p:cNvPr id="307" name="Google Shape;307;p49"/>
           <p:cNvSpPr txBox="1"/>
           <p:nvPr>
             <p:ph idx="3" type="body"/>
@@ -32437,7 +33666,7 @@
       </p:sp>
       <p:pic>
         <p:nvPicPr>
-          <p:cNvPr descr="Blue and green wave pattern. " id="300" name="Google Shape;300;p48"/>
+          <p:cNvPr descr="Blue and green wave pattern. " id="308" name="Google Shape;308;p49"/>
           <p:cNvPicPr preferRelativeResize="0"/>
           <p:nvPr>
             <p:ph idx="2" type="pic"/>
@@ -32469,7 +33698,7 @@
       </p:pic>
       <p:pic>
         <p:nvPicPr>
-          <p:cNvPr id="301" name="Google Shape;301;p48" title="{&quot;red&quot;:18,&quot;green&quot;:18,&quot;blue&quot;:18,&quot;origURL&quot;:&quot;https://www.codecogs.com/eqnedit.php?latex=H_0%3A%20%5C%20%5Cmu_%7Bschool%7D%20%3D%20%5Cmu_%7Bwork%7D#0&quot;,&quot;size&quot;:10,&quot;width&quot;:248.17322834645668,&quot;height&quot;:224.1496062992126}"/>
+          <p:cNvPr id="309" name="Google Shape;309;p49" title="{&quot;red&quot;:18,&quot;green&quot;:18,&quot;blue&quot;:18,&quot;origURL&quot;:&quot;https://www.codecogs.com/eqnedit.php?latex=H_0%3A%20%5C%20%5Cmu_%7Bschool%7D%20%3D%20%5Cmu_%7Bwork%7D#0&quot;,&quot;size&quot;:10,&quot;width&quot;:248.17322834645668,&quot;height&quot;:224.1496062992126}"/>
           <p:cNvPicPr preferRelativeResize="0"/>
           <p:nvPr/>
         </p:nvPicPr>
@@ -32497,7 +33726,7 @@
       </p:pic>
       <p:pic>
         <p:nvPicPr>
-          <p:cNvPr id="302" name="Google Shape;302;p48" title="{&quot;red&quot;:18,&quot;green&quot;:18,&quot;blue&quot;:18,&quot;origURL&quot;:&quot;https://www.codecogs.com/eqnedit.php?latex=H_%5Calpha%3A%20%5C%20%5Cmu_%7Bschool%7D%20%5Cneq%20%5Cmu_%7Bwork%7D#0&quot;,&quot;size&quot;:10,&quot;width&quot;:248.17322834645668,&quot;height&quot;:224.1496062992126}"/>
+          <p:cNvPr id="310" name="Google Shape;310;p49" title="{&quot;red&quot;:18,&quot;green&quot;:18,&quot;blue&quot;:18,&quot;origURL&quot;:&quot;https://www.codecogs.com/eqnedit.php?latex=H_%5Calpha%3A%20%5C%20%5Cmu_%7Bschool%7D%20%5Cneq%20%5Cmu_%7Bwork%7D#0&quot;,&quot;size&quot;:10,&quot;width&quot;:248.17322834645668,&quot;height&quot;:224.1496062992126}"/>
           <p:cNvPicPr preferRelativeResize="0"/>
           <p:nvPr/>
         </p:nvPicPr>
@@ -32531,12 +33760,12 @@
 </p:sld>
 </file>
 
-<file path=ppt/slides/slide6.xml><?xml version="1.0" encoding="utf-8"?>
+<file path=ppt/slides/slide7.xml><?xml version="1.0" encoding="utf-8"?>
 <p:sld xmlns:a="http://schemas.openxmlformats.org/drawingml/2006/main" xmlns:r="http://schemas.openxmlformats.org/officeDocument/2006/relationships" xmlns:mc="http://schemas.openxmlformats.org/markup-compatibility/2006" xmlns:mv="urn:schemas-microsoft-com:mac:vml" xmlns:p="http://schemas.openxmlformats.org/presentationml/2006/main" xmlns:c="http://schemas.openxmlformats.org/drawingml/2006/chart" xmlns:dgm="http://schemas.openxmlformats.org/drawingml/2006/diagram" xmlns:o="urn:schemas-microsoft-com:office:office" xmlns:v="urn:schemas-microsoft-com:vml" xmlns:pvml="urn:schemas-microsoft-com:office:powerpoint" xmlns:com="http://schemas.openxmlformats.org/drawingml/2006/compatibility" xmlns:p14="http://schemas.microsoft.com/office/powerpoint/2010/main" xmlns:p15="http://schemas.microsoft.com/office/powerpoint/2012/main" xmlns:ahyp="http://schemas.microsoft.com/office/drawing/2018/hyperlinkcolor">
   <p:cSld>
     <p:spTree>
       <p:nvGrpSpPr>
-        <p:cNvPr id="306" name="Shape 306"/>
+        <p:cNvPr id="314" name="Shape 314"/>
         <p:cNvGrpSpPr/>
         <p:nvPr/>
       </p:nvGrpSpPr>
@@ -32550,7 +33779,7 @@
       </p:grpSpPr>
       <p:sp>
         <p:nvSpPr>
-          <p:cNvPr id="307" name="Google Shape;307;p49"/>
+          <p:cNvPr id="315" name="Google Shape;315;p50"/>
           <p:cNvSpPr txBox="1"/>
           <p:nvPr>
             <p:ph type="title"/>
@@ -32590,7 +33819,7 @@
       </p:sp>
       <p:sp>
         <p:nvSpPr>
-          <p:cNvPr id="308" name="Google Shape;308;p49"/>
+          <p:cNvPr id="316" name="Google Shape;316;p50"/>
           <p:cNvSpPr txBox="1"/>
           <p:nvPr>
             <p:ph idx="1" type="body"/>
@@ -32718,7 +33947,7 @@
       </p:sp>
       <p:sp>
         <p:nvSpPr>
-          <p:cNvPr id="309" name="Google Shape;309;p49"/>
+          <p:cNvPr id="317" name="Google Shape;317;p50"/>
           <p:cNvSpPr txBox="1"/>
           <p:nvPr>
             <p:ph idx="2" type="body"/>
@@ -32758,7 +33987,7 @@
       </p:sp>
       <p:sp>
         <p:nvSpPr>
-          <p:cNvPr id="310" name="Google Shape;310;p49"/>
+          <p:cNvPr id="318" name="Google Shape;318;p50"/>
           <p:cNvSpPr txBox="1"/>
           <p:nvPr>
             <p:ph idx="3" type="body"/>
@@ -32798,7 +34027,7 @@
       </p:sp>
       <p:pic>
         <p:nvPicPr>
-          <p:cNvPr id="311" name="Google Shape;311;p49"/>
+          <p:cNvPr id="319" name="Google Shape;319;p50"/>
           <p:cNvPicPr preferRelativeResize="0"/>
           <p:nvPr/>
         </p:nvPicPr>
@@ -32832,12 +34061,12 @@
 </p:sld>
 </file>
 
-<file path=ppt/slides/slide7.xml><?xml version="1.0" encoding="utf-8"?>
+<file path=ppt/slides/slide8.xml><?xml version="1.0" encoding="utf-8"?>
 <p:sld xmlns:a="http://schemas.openxmlformats.org/drawingml/2006/main" xmlns:r="http://schemas.openxmlformats.org/officeDocument/2006/relationships" xmlns:mc="http://schemas.openxmlformats.org/markup-compatibility/2006" xmlns:mv="urn:schemas-microsoft-com:mac:vml" xmlns:p="http://schemas.openxmlformats.org/presentationml/2006/main" xmlns:c="http://schemas.openxmlformats.org/drawingml/2006/chart" xmlns:dgm="http://schemas.openxmlformats.org/drawingml/2006/diagram" xmlns:o="urn:schemas-microsoft-com:office:office" xmlns:v="urn:schemas-microsoft-com:vml" xmlns:pvml="urn:schemas-microsoft-com:office:powerpoint" xmlns:com="http://schemas.openxmlformats.org/drawingml/2006/compatibility" xmlns:p14="http://schemas.microsoft.com/office/powerpoint/2010/main" xmlns:p15="http://schemas.microsoft.com/office/powerpoint/2012/main" xmlns:ahyp="http://schemas.microsoft.com/office/drawing/2018/hyperlinkcolor">
   <p:cSld>
     <p:spTree>
       <p:nvGrpSpPr>
-        <p:cNvPr id="315" name="Shape 315"/>
+        <p:cNvPr id="323" name="Shape 323"/>
         <p:cNvGrpSpPr/>
         <p:nvPr/>
       </p:nvGrpSpPr>
@@ -32851,7 +34080,7 @@
       </p:grpSpPr>
       <p:sp>
         <p:nvSpPr>
-          <p:cNvPr id="316" name="Google Shape;316;p50"/>
+          <p:cNvPr id="324" name="Google Shape;324;p51"/>
           <p:cNvSpPr txBox="1"/>
           <p:nvPr>
             <p:ph type="title"/>
@@ -32891,7 +34120,7 @@
       </p:sp>
       <p:sp>
         <p:nvSpPr>
-          <p:cNvPr id="317" name="Google Shape;317;p50"/>
+          <p:cNvPr id="325" name="Google Shape;325;p51"/>
           <p:cNvSpPr txBox="1"/>
           <p:nvPr>
             <p:ph idx="1" type="body"/>
@@ -32947,7 +34176,7 @@
       </p:sp>
       <p:sp>
         <p:nvSpPr>
-          <p:cNvPr id="318" name="Google Shape;318;p50"/>
+          <p:cNvPr id="326" name="Google Shape;326;p51"/>
           <p:cNvSpPr txBox="1"/>
           <p:nvPr>
             <p:ph idx="12" type="sldNum"/>
@@ -32987,7 +34216,7 @@
       </p:sp>
       <p:sp>
         <p:nvSpPr>
-          <p:cNvPr id="319" name="Google Shape;319;p50"/>
+          <p:cNvPr id="327" name="Google Shape;327;p51"/>
           <p:cNvSpPr txBox="1"/>
           <p:nvPr>
             <p:ph idx="3" type="body"/>
@@ -33027,7 +34256,7 @@
       </p:sp>
       <p:sp>
         <p:nvSpPr>
-          <p:cNvPr id="320" name="Google Shape;320;p50"/>
+          <p:cNvPr id="328" name="Google Shape;328;p51"/>
           <p:cNvSpPr txBox="1"/>
           <p:nvPr>
             <p:ph idx="4" type="body"/>
@@ -33067,7 +34296,7 @@
       </p:sp>
       <p:pic>
         <p:nvPicPr>
-          <p:cNvPr id="321" name="Google Shape;321;p50"/>
+          <p:cNvPr id="329" name="Google Shape;329;p51"/>
           <p:cNvPicPr preferRelativeResize="0"/>
           <p:nvPr/>
         </p:nvPicPr>
@@ -33093,6 +34322,285 @@
           </a:ln>
         </p:spPr>
       </p:pic>
+    </p:spTree>
+  </p:cSld>
+  <p:clrMapOvr>
+    <a:masterClrMapping/>
+  </p:clrMapOvr>
+</p:sld>
+</file>
+
+<file path=ppt/slides/slide9.xml><?xml version="1.0" encoding="utf-8"?>
+<p:sld xmlns:a="http://schemas.openxmlformats.org/drawingml/2006/main" xmlns:r="http://schemas.openxmlformats.org/officeDocument/2006/relationships" xmlns:mc="http://schemas.openxmlformats.org/markup-compatibility/2006" xmlns:mv="urn:schemas-microsoft-com:mac:vml" xmlns:p="http://schemas.openxmlformats.org/presentationml/2006/main" xmlns:c="http://schemas.openxmlformats.org/drawingml/2006/chart" xmlns:dgm="http://schemas.openxmlformats.org/drawingml/2006/diagram" xmlns:o="urn:schemas-microsoft-com:office:office" xmlns:v="urn:schemas-microsoft-com:vml" xmlns:pvml="urn:schemas-microsoft-com:office:powerpoint" xmlns:com="http://schemas.openxmlformats.org/drawingml/2006/compatibility" xmlns:p14="http://schemas.microsoft.com/office/powerpoint/2010/main" xmlns:p15="http://schemas.microsoft.com/office/powerpoint/2012/main" xmlns:ahyp="http://schemas.microsoft.com/office/drawing/2018/hyperlinkcolor">
+  <p:cSld>
+    <p:spTree>
+      <p:nvGrpSpPr>
+        <p:cNvPr id="333" name="Shape 333"/>
+        <p:cNvGrpSpPr/>
+        <p:nvPr/>
+      </p:nvGrpSpPr>
+      <p:grpSpPr>
+        <a:xfrm>
+          <a:off x="0" y="0"/>
+          <a:ext cx="0" cy="0"/>
+          <a:chOff x="0" y="0"/>
+          <a:chExt cx="0" cy="0"/>
+        </a:xfrm>
+      </p:grpSpPr>
+      <p:sp>
+        <p:nvSpPr>
+          <p:cNvPr id="334" name="Google Shape;334;p52"/>
+          <p:cNvSpPr txBox="1"/>
+          <p:nvPr>
+            <p:ph type="title"/>
+          </p:nvPr>
+        </p:nvSpPr>
+        <p:spPr>
+          <a:xfrm>
+            <a:off x="2996100" y="1120675"/>
+            <a:ext cx="3151800" cy="652500"/>
+          </a:xfrm>
+          <a:prstGeom prst="rect">
+            <a:avLst/>
+          </a:prstGeom>
+        </p:spPr>
+        <p:txBody>
+          <a:bodyPr anchorCtr="0" anchor="b" bIns="91425" lIns="91425" spcFirstLastPara="1" rIns="91425" wrap="square" tIns="91425">
+            <a:noAutofit/>
+          </a:bodyPr>
+          <a:lstStyle/>
+          <a:p>
+            <a:pPr indent="0" lvl="0" marL="0" rtl="0" algn="l">
+              <a:spcBef>
+                <a:spcPts val="0"/>
+              </a:spcBef>
+              <a:spcAft>
+                <a:spcPts val="0"/>
+              </a:spcAft>
+              <a:buNone/>
+            </a:pPr>
+            <a:r>
+              <a:rPr lang="en"/>
+              <a:t>Limitations:</a:t>
+            </a:r>
+            <a:endParaRPr/>
+          </a:p>
+        </p:txBody>
+      </p:sp>
+      <p:sp>
+        <p:nvSpPr>
+          <p:cNvPr id="335" name="Google Shape;335;p52"/>
+          <p:cNvSpPr txBox="1"/>
+          <p:nvPr>
+            <p:ph idx="1" type="body"/>
+          </p:nvPr>
+        </p:nvSpPr>
+        <p:spPr>
+          <a:xfrm>
+            <a:off x="2057400" y="2100525"/>
+            <a:ext cx="5030100" cy="1822500"/>
+          </a:xfrm>
+          <a:prstGeom prst="rect">
+            <a:avLst/>
+          </a:prstGeom>
+        </p:spPr>
+        <p:txBody>
+          <a:bodyPr anchorCtr="0" anchor="t" bIns="91425" lIns="91425" spcFirstLastPara="1" rIns="91425" wrap="square" tIns="91425">
+            <a:noAutofit/>
+          </a:bodyPr>
+          <a:lstStyle/>
+          <a:p>
+            <a:pPr indent="-304800" lvl="0" marL="457200" rtl="0" algn="l">
+              <a:spcBef>
+                <a:spcPts val="0"/>
+              </a:spcBef>
+              <a:spcAft>
+                <a:spcPts val="0"/>
+              </a:spcAft>
+              <a:buSzPts val="1200"/>
+              <a:buChar char="●"/>
+            </a:pPr>
+            <a:r>
+              <a:rPr lang="en" sz="1200"/>
+              <a:t>Small data set</a:t>
+            </a:r>
+            <a:endParaRPr sz="1200"/>
+          </a:p>
+          <a:p>
+            <a:pPr indent="-304800" lvl="0" marL="457200" rtl="0" algn="l">
+              <a:spcBef>
+                <a:spcPts val="0"/>
+              </a:spcBef>
+              <a:spcAft>
+                <a:spcPts val="0"/>
+              </a:spcAft>
+              <a:buSzPts val="1200"/>
+              <a:buChar char="●"/>
+            </a:pPr>
+            <a:r>
+              <a:rPr lang="en" sz="1200"/>
+              <a:t>An outlier (34mg) affecting results</a:t>
+            </a:r>
+            <a:endParaRPr sz="1200"/>
+          </a:p>
+          <a:p>
+            <a:pPr indent="-304800" lvl="0" marL="457200" rtl="0" algn="l">
+              <a:spcBef>
+                <a:spcPts val="0"/>
+              </a:spcBef>
+              <a:spcAft>
+                <a:spcPts val="0"/>
+              </a:spcAft>
+              <a:buSzPts val="1200"/>
+              <a:buChar char="●"/>
+            </a:pPr>
+            <a:r>
+              <a:rPr lang="en" sz="1200"/>
+              <a:t>Only reflects my habits, not a population’s</a:t>
+            </a:r>
+            <a:endParaRPr sz="1200"/>
+          </a:p>
+          <a:p>
+            <a:pPr indent="-304800" lvl="0" marL="457200" rtl="0" algn="l">
+              <a:spcBef>
+                <a:spcPts val="0"/>
+              </a:spcBef>
+              <a:spcAft>
+                <a:spcPts val="0"/>
+              </a:spcAft>
+              <a:buSzPts val="1200"/>
+              <a:buChar char="●"/>
+            </a:pPr>
+            <a:r>
+              <a:rPr lang="en" sz="1200"/>
+              <a:t>Self-reported</a:t>
+            </a:r>
+            <a:endParaRPr sz="1200"/>
+          </a:p>
+          <a:p>
+            <a:pPr indent="-304800" lvl="0" marL="457200" rtl="0" algn="l">
+              <a:spcBef>
+                <a:spcPts val="0"/>
+              </a:spcBef>
+              <a:spcAft>
+                <a:spcPts val="0"/>
+              </a:spcAft>
+              <a:buSzPts val="1200"/>
+              <a:buChar char="●"/>
+            </a:pPr>
+            <a:r>
+              <a:rPr lang="en" sz="1200"/>
+              <a:t>Other variables might have contributed to an increase or decrease in caffeine intake (i.e. sleep </a:t>
+            </a:r>
+            <a:r>
+              <a:rPr lang="en" sz="1200"/>
+              <a:t>quality</a:t>
+            </a:r>
+            <a:r>
+              <a:rPr lang="en" sz="1200"/>
+              <a:t>, stress, etc.)</a:t>
+            </a:r>
+            <a:endParaRPr sz="1200"/>
+          </a:p>
+          <a:p>
+            <a:pPr indent="-304800" lvl="0" marL="457200" rtl="0" algn="l">
+              <a:spcBef>
+                <a:spcPts val="0"/>
+              </a:spcBef>
+              <a:spcAft>
+                <a:spcPts val="0"/>
+              </a:spcAft>
+              <a:buSzPts val="1200"/>
+              <a:buChar char="●"/>
+            </a:pPr>
+            <a:r>
+              <a:rPr lang="en" sz="1200"/>
+              <a:t>Potential inaccuracies for caffeine count during a day</a:t>
+            </a:r>
+            <a:endParaRPr sz="1200"/>
+          </a:p>
+        </p:txBody>
+      </p:sp>
+      <p:sp>
+        <p:nvSpPr>
+          <p:cNvPr id="336" name="Google Shape;336;p52"/>
+          <p:cNvSpPr txBox="1"/>
+          <p:nvPr>
+            <p:ph idx="3" type="body"/>
+          </p:nvPr>
+        </p:nvSpPr>
+        <p:spPr>
+          <a:xfrm>
+            <a:off x="196951" y="196725"/>
+            <a:ext cx="1860300" cy="209100"/>
+          </a:xfrm>
+          <a:prstGeom prst="rect">
+            <a:avLst/>
+          </a:prstGeom>
+        </p:spPr>
+        <p:txBody>
+          <a:bodyPr anchorCtr="0" anchor="ctr" bIns="91425" lIns="91425" spcFirstLastPara="1" rIns="91425" wrap="square" tIns="91425">
+            <a:noAutofit/>
+          </a:bodyPr>
+          <a:lstStyle/>
+          <a:p>
+            <a:pPr indent="0" lvl="0" marL="0" rtl="0" algn="l">
+              <a:spcBef>
+                <a:spcPts val="0"/>
+              </a:spcBef>
+              <a:spcAft>
+                <a:spcPts val="1200"/>
+              </a:spcAft>
+              <a:buNone/>
+            </a:pPr>
+            <a:r>
+              <a:rPr lang="en"/>
+              <a:t>Limitations</a:t>
+            </a:r>
+            <a:endParaRPr/>
+          </a:p>
+        </p:txBody>
+      </p:sp>
+      <p:sp>
+        <p:nvSpPr>
+          <p:cNvPr id="337" name="Google Shape;337;p52"/>
+          <p:cNvSpPr txBox="1"/>
+          <p:nvPr>
+            <p:ph idx="4" type="body"/>
+          </p:nvPr>
+        </p:nvSpPr>
+        <p:spPr>
+          <a:xfrm>
+            <a:off x="7087526" y="196725"/>
+            <a:ext cx="1933500" cy="209100"/>
+          </a:xfrm>
+          <a:prstGeom prst="rect">
+            <a:avLst/>
+          </a:prstGeom>
+        </p:spPr>
+        <p:txBody>
+          <a:bodyPr anchorCtr="0" anchor="ctr" bIns="91425" lIns="91425" spcFirstLastPara="1" rIns="91425" wrap="square" tIns="91425">
+            <a:noAutofit/>
+          </a:bodyPr>
+          <a:lstStyle/>
+          <a:p>
+            <a:pPr indent="0" lvl="0" marL="0" rtl="0" algn="r">
+              <a:spcBef>
+                <a:spcPts val="0"/>
+              </a:spcBef>
+              <a:spcAft>
+                <a:spcPts val="1200"/>
+              </a:spcAft>
+              <a:buNone/>
+            </a:pPr>
+            <a:r>
+              <a:rPr lang="en"/>
+              <a:t>Caffeine Study</a:t>
+            </a:r>
+            <a:endParaRPr/>
+          </a:p>
+        </p:txBody>
+      </p:sp>
     </p:spTree>
   </p:cSld>
   <p:clrMapOvr>
